--- a/dist/초1/국어/대화와문학/초1_국어_대화와문학_03_그림책읽고이야기하기_학생용.pptx
+++ b/dist/초1/국어/대화와문학/초1_국어_대화와문학_03_그림책읽고이야기하기_학생용.pptx
@@ -119,19 +119,19 @@
   <p:extLst>
     <p:ext uri="{521415D9-36F7-43E2-AB2F-B90AF26B5E84}">
       <p14:sectionLst xmlns:p14="http://schemas.microsoft.com/office/powerpoint/2010/main">
-        <p14:section name="도입" id="{1d0887da-6455-ec6c-ca1d-159541375faf}">
+        <p14:section name="도입" id="{1b27ab75-422e-d503-7ed7-244aeabe52cd}">
           <p14:sldIdLst>
             <p14:sldId id="256"/>
             <p14:sldId id="257"/>
           </p14:sldIdLst>
         </p14:section>
-        <p14:section name="개념" id="{9203080f-f96b-06cc-0383-87c41761e202}">
+        <p14:section name="개념" id="{ccf3da05-77b2-3805-9bbf-fbce9322b35a}">
           <p14:sldIdLst>
             <p14:sldId id="258"/>
             <p14:sldId id="259"/>
           </p14:sldIdLst>
         </p14:section>
-        <p14:section name="연습" id="{1b015a23-b603-46d2-ebc3-6d67c66070df}">
+        <p14:section name="연습" id="{bb2458a9-ce86-65a8-4b46-55a39f5cf78b}">
           <p14:sldIdLst>
             <p14:sldId id="260"/>
             <p14:sldId id="261"/>
@@ -140,18 +140,18 @@
             <p14:sldId id="264"/>
           </p14:sldIdLst>
         </p14:section>
-        <p14:section name="확인" id="{c419bf1f-a294-db02-3522-0316b413328e}">
+        <p14:section name="확인" id="{876ca580-d348-b64c-80c4-b4b418fd6a10}">
           <p14:sldIdLst>
             <p14:sldId id="265"/>
             <p14:sldId id="266"/>
           </p14:sldIdLst>
         </p14:section>
-        <p14:section name="정리" id="{95948ad6-4d0b-dccc-7ed6-30ecda0d46d7}">
+        <p14:section name="정리" id="{71113f12-feb8-7033-9d6e-12be3b9cddf7}">
           <p14:sldIdLst>
             <p14:sldId id="267"/>
           </p14:sldIdLst>
         </p14:section>
-        <p14:section name="보충" id="{3a6de3d3-2a48-40ff-104f-7c0692e9b32a}">
+        <p14:section name="보충" id="{23926446-346d-adf2-e05e-a6f279479997}">
           <p14:sldIdLst>
             <p14:sldId id="268"/>
           </p14:sldIdLst>

--- a/dist/초1/국어/대화와문학/초1_국어_대화와문학_03_그림책읽고이야기하기_학생용.pptx
+++ b/dist/초1/국어/대화와문학/초1_국어_대화와문학_03_그림책읽고이야기하기_학생용.pptx
@@ -119,19 +119,19 @@
   <p:extLst>
     <p:ext uri="{521415D9-36F7-43E2-AB2F-B90AF26B5E84}">
       <p14:sectionLst xmlns:p14="http://schemas.microsoft.com/office/powerpoint/2010/main">
-        <p14:section name="도입" id="{1b27ab75-422e-d503-7ed7-244aeabe52cd}">
+        <p14:section name="도입" id="{bf9a2d93-2fdb-a89c-da00-4eb4c0bb128c}">
           <p14:sldIdLst>
             <p14:sldId id="256"/>
             <p14:sldId id="257"/>
           </p14:sldIdLst>
         </p14:section>
-        <p14:section name="개념" id="{ccf3da05-77b2-3805-9bbf-fbce9322b35a}">
+        <p14:section name="개념" id="{63294c57-b78f-3004-d66e-7c271ec39bc1}">
           <p14:sldIdLst>
             <p14:sldId id="258"/>
             <p14:sldId id="259"/>
           </p14:sldIdLst>
         </p14:section>
-        <p14:section name="연습" id="{bb2458a9-ce86-65a8-4b46-55a39f5cf78b}">
+        <p14:section name="연습" id="{f6f3a8b2-c3da-0bf4-b188-4436c71aa9d9}">
           <p14:sldIdLst>
             <p14:sldId id="260"/>
             <p14:sldId id="261"/>
@@ -140,18 +140,18 @@
             <p14:sldId id="264"/>
           </p14:sldIdLst>
         </p14:section>
-        <p14:section name="확인" id="{876ca580-d348-b64c-80c4-b4b418fd6a10}">
+        <p14:section name="확인" id="{6171fd19-7a44-2502-9aec-8c8965694c22}">
           <p14:sldIdLst>
             <p14:sldId id="265"/>
             <p14:sldId id="266"/>
           </p14:sldIdLst>
         </p14:section>
-        <p14:section name="정리" id="{71113f12-feb8-7033-9d6e-12be3b9cddf7}">
+        <p14:section name="정리" id="{d7e8085a-989a-2b86-dbb1-b7457d87b837}">
           <p14:sldIdLst>
             <p14:sldId id="267"/>
           </p14:sldIdLst>
         </p14:section>
-        <p14:section name="보충" id="{23926446-346d-adf2-e05e-a6f279479997}">
+        <p14:section name="보충" id="{8e76c030-884a-0f11-ea98-20b7c455529d}">
           <p14:sldIdLst>
             <p14:sldId id="268"/>
           </p14:sldIdLst>
@@ -2699,7 +2699,7 @@
               <a:buNone/>
             </a:pPr>
             <a:r>
-              <a:rPr lang="ko-KR" altLang="en-US" sz="5000" b="1" dirty="0">
+              <a:rPr lang="ko-KR" altLang="en-US" sz="4400" b="1" dirty="0">
                 <a:solidFill>
                   <a:srgbClr val="FFFFFF"/>
                 </a:solidFill>
